--- a/dashboard/public/exec_deck.pptx
+++ b/dashboard/public/exec_deck.pptx
@@ -3826,7 +3826,7 @@
                   <a:srgbClr val="991B1B"/>
                 </a:solidFill>
               </a:rPr>
-              <a:t>Outokumpu- S2P Project:</a:t>
+              <a:t>Titan:</a:t>
             </a:r>
             <a:r>
               <a:rPr b="0">
@@ -3834,7 +3834,7 @@
                   <a:srgbClr val="991B1B"/>
                 </a:solidFill>
               </a:rPr>
-              <a:t> RAG sequence over 6 weeks exhibits stagnation: Red → Red → Red → Red → Red → Red</a:t>
+              <a:t> RAG sequence over 5 weeks exhibits stagnation: Red → Red → Red → Red → Red</a:t>
             </a:r>
           </a:p>
         </p:txBody>
@@ -3894,7 +3894,7 @@
                   <a:srgbClr val="991B1B"/>
                 </a:solidFill>
               </a:rPr>
-              <a:t>  - Schedule drift remains unmitigated on Outokumpu- S2P Project (schedule subscore:</a:t>
+              <a:t>  - Schedule drift remains unmitigated on Titan (schedule subscore:</a:t>
             </a:r>
             <a:r>
               <a:rPr b="0">
@@ -3962,7 +3962,7 @@
                   <a:srgbClr val="991B1B"/>
                 </a:solidFill>
               </a:rPr>
-              <a:t>Project Plan:</a:t>
+              <a:t>UniSan:</a:t>
             </a:r>
             <a:r>
               <a:rPr b="0">
@@ -3970,7 +3970,7 @@
                   <a:srgbClr val="991B1B"/>
                 </a:solidFill>
               </a:rPr>
-              <a:t> RAG sequence over 6 weeks exhibits stagnation: Amber → Amber → Amber → Red → Amber → Amber</a:t>
+              <a:t> RAG sequence over 5 weeks exhibits stagnation: Amber → Amber → Amber → Red → Amber</a:t>
             </a:r>
           </a:p>
         </p:txBody>
@@ -4522,7 +4522,7 @@
                   <a:srgbClr val="334155"/>
                 </a:solidFill>
               </a:rPr>
-              <a:t> Disagreement flags active in 11/12 of weekly reports.</a:t>
+              <a:t> Disagreement flags active in 9/10 of weekly reports.</a:t>
             </a:r>
           </a:p>
         </p:txBody>
@@ -4582,7 +4582,7 @@
                   <a:srgbClr val="991B1B"/>
                 </a:solidFill>
               </a:rPr>
-              <a:t>  - Outokumpu- S2P Project:</a:t>
+              <a:t>  - Titan:</a:t>
             </a:r>
             <a:r>
               <a:rPr b="0">
@@ -4650,7 +4650,7 @@
                   <a:srgbClr val="991B1B"/>
                 </a:solidFill>
               </a:rPr>
-              <a:t>  - Project Plan:</a:t>
+              <a:t>  - UniSan:</a:t>
             </a:r>
             <a:r>
               <a:rPr b="0">
@@ -5210,7 +5210,7 @@
                   <a:srgbClr val="991B1B"/>
                 </a:solidFill>
               </a:rPr>
-              <a:t> recovery audit on Outokumpu - S2P Project to remediate critical schedule slips.</a:t>
+              <a:t> recovery audit on Titan to remediate critical schedule slips.</a:t>
             </a:r>
           </a:p>
         </p:txBody>
